--- a/lectures/Lecture 10.2 - The Future.pptx
+++ b/lectures/Lecture 10.2 - The Future.pptx
@@ -1418,7 +1418,7 @@
             </a:pPr>
             <a:r>
               <a:rPr lang="en-US"/>
-              <a:t>The network is a graph with no central map, and routing is distributed shortest-path running continuously, so it heals around damage by itself. The thing that breaks intuition isn't the algorithm - it's that it's distributed, live, and self-healing with nobody in charge. That self-healing-under-failure property was the whole ARPANET design motivation.</a:t>
+              <a:t>The network is a graph with no central map, and routing is distributed shortest-path running continuously, so it heals around damage by itself. What breaks intuition here is that the whole thing runs distributed and live and self-healing, with nobody in charge of any of it. That self-healing-under-failure property was the whole ARPANET design motivation.</a:t>
             </a:r>
             <a:endParaRPr/>
           </a:p>
@@ -1569,7 +1569,7 @@
             </a:pPr>
             <a:r>
               <a:rPr lang="en-US"/>
-              <a:t>The reveal. The cool part, front and center: the network is a graph with no central map, and routing is distributed shortest-path running continuously, so it heals around damage by itself. The thing that breaks intuition isn't the algorithm (they may know Dijkstra) - it's that it's distributed, live, and self-healing with nobody in charge. That self-healing-under-failure property was the whole ARPANET design motivation.</a:t>
+              <a:t>The reveal. The cool part, front and center: the network is a graph with no central map, and routing is distributed shortest-path running continuously, so it heals around damage by itself. They may well know Dijkstra already, so what breaks intuition here is that the whole thing runs distributed and live and self-healing, with nobody in charge of any of it. That self-healing-under-failure property was the whole ARPANET design motivation.</a:t>
             </a:r>
             <a:endParaRPr/>
           </a:p>
@@ -2022,7 +2022,7 @@
             </a:pPr>
             <a:r>
               <a:rPr lang="en-US"/>
-              <a:t>Step two, the PROBE. The engine walks the BIG table (messages) exactly once; for each row it hashes the user_id, finds the name in the hash table in one O(1) step, and emits the joined row. Cost: ~10M, one lookup per message. Build (~1M) plus probe (~10M) is about 11M steps total, versus 10 trillion for the nested-loop way - and nobody wrote a line of it; the planner chose it.</a:t>
+              <a:t>Step two, the PROBE. The engine walks the BIG table (messages) exactly once; for each row it hashes the user_id, finds the name in the hash table in one O(1) step, and emits the joined row. Cost: ~10M, one lookup per message. Build (~1M) plus probe (~10M) is about 11M steps total, against 10 trillion for the nested-loop way, and nobody wrote a line of that - the planner picked it on its own.</a:t>
             </a:r>
             <a:endParaRPr/>
           </a:p>
@@ -3079,7 +3079,7 @@
             </a:pPr>
             <a:r>
               <a:rPr lang="en-US"/>
-              <a:t>The core idea. A public/private key pair is generated together and mathematically linked: whatever one locks, only the OTHER opens. Because locking and unlocking are now DIFFERENT keys, Bob can publish the locking (public) key to the whole world - the eavesdropper included - without ever exposing the unlocking (private) one. That asymmetry is the entire trick, and it's why this is called asymmetric, or public-key, cryptography.</a:t>
+              <a:t>The core idea. A public/private key pair is generated together and mathematically linked: whatever one locks, only the OTHER opens. Because locking and unlocking are now DIFFERENT keys, Bob can publish the locking (public) key to the whole world - the eavesdropper included - without ever exposing the unlocking (private) one. That asymmetry is the whole thing, and it's where the name comes from - asymmetric, or public-key, cryptography.</a:t>
             </a:r>
             <a:endParaRPr/>
           </a:p>
@@ -3714,7 +3714,7 @@
             </a:pPr>
             <a:r>
               <a:rPr lang="en-US"/>
-              <a:t>The reveal. Two things to land: (1) WHY a public key can be public - it rests on a one-way / trapdoor function (easy forward, infeasible back), the classic example being multiply-two-primes vs factor-the-product; and (2) real HTTPS uses the slow public-key step only to agree on a fast symmetric session key, then switches to that - so asymmetric to bootstrap, symmetric for the bulk. This is the full payoff to 9.2's coffee-shop-WiFi question. 'Don't roll your own crypto' stops being a slogan once you see how subtle this is.</a:t>
+              <a:t>The reveal. Two things to land: (1) WHY a public key can be public - it rests on a one-way / trapdoor function (easy forward, infeasible back), the classic example being multiply-two-primes vs factor-the-product; and (2) real HTTPS uses the slow public-key step only to agree on a fast symmetric session key, then switches to that - so the asymmetric part bootstraps it and the symmetric part carries the bulk. This is where 9.2's coffee-shop-WiFi question finally gets its answer. 'Don't roll your own crypto' stops being a slogan once you see how subtle this is.</a:t>
             </a:r>
             <a:endParaRPr/>
           </a:p>
@@ -4293,7 +4293,7 @@
             </a:pPr>
             <a:r>
               <a:rPr lang="en-US"/>
-              <a:t>Frame it as a game, not a survey. The whole move is: get the room to commit to an answer FIRST, out loud, and only then show that the obvious answer doesn't hold and there's a field behind the gap. The wrong answer is the setup; the field is the punchline. Keep the book/course pointers in these notes and only say them out loud if a student bites.</a:t>
+              <a:t>Frame it as a game, not a survey. The whole move is getting the room to commit to an answer FIRST, out loud, and only then showing that the obvious answer doesn't hold up and there's a whole field sitting behind the gap. Their wrong answer is doing the setup work for you. Keep the book/course pointers in these notes and only say them out loud if a student bites.</a:t>
             </a:r>
             <a:endParaRPr/>
           </a:p>

--- a/lectures/Lecture 10.2 - The Future.pptx
+++ b/lectures/Lecture 10.2 - The Future.pptx
@@ -803,20 +803,9 @@
           </a:bodyPr>
           <a:lstStyle/>
           <a:p>
-            <a:pPr indent="0" lvl="0" marL="0" rtl="0" algn="l">
-              <a:spcBef>
-                <a:spcPts val="0"/>
-              </a:spcBef>
-              <a:spcAft>
-                <a:spcPts val="0"/>
-              </a:spcAft>
-              <a:buNone/>
-            </a:pPr>
-            <a:r>
-              <a:rPr lang="en-US"/>
-              <a:t>Last lecture of the semester. Two halves: project demos for the first chunk of the slot, then a game for the second half - six small problems pulled out of the app they built, each one rigged so their gut answer is wrong, and the field of CS they didn't take is what fixes it. Deliberately lighter than a normal lecture - demo day is tiring, and ending on argue-and-reveal is a good way to close out the semester.</a:t>
-            </a:r>
-            <a:endParaRPr/>
+            <a:r>
+              <a:t>Demos first, then the game for the second half.</a:t>
+            </a:r>
           </a:p>
         </p:txBody>
       </p:sp>
@@ -954,20 +943,9 @@
           </a:bodyPr>
           <a:lstStyle/>
           <a:p>
-            <a:pPr indent="0" lvl="0" marL="0" rtl="0" algn="l">
-              <a:spcBef>
-                <a:spcPts val="0"/>
-              </a:spcBef>
-              <a:spcAft>
-                <a:spcPts val="0"/>
-              </a:spcAft>
-              <a:buNone/>
-            </a:pPr>
-            <a:r>
-              <a:rPr lang="en-US"/>
-              <a:t>A pointer doesn't point at real memory - virtual addressing is invisible from inside your program, which is exactly why it never came up all semester. Strong pick for anyone who wants to understand what's really inside a process or a container.</a:t>
-            </a:r>
-            <a:endParaRPr/>
+            <a:r>
+              <a:t>Pointer: OSTEP (free online), Wisconsin OS lectures on YouTube.</a:t>
+            </a:r>
           </a:p>
         </p:txBody>
       </p:sp>
@@ -1105,20 +1083,9 @@
           </a:bodyPr>
           <a:lstStyle/>
           <a:p>
-            <a:pPr indent="0" lvl="0" marL="0" rtl="0" algn="l">
-              <a:spcBef>
-                <a:spcPts val="0"/>
-              </a:spcBef>
-              <a:spcAft>
-                <a:spcPts val="0"/>
-              </a:spcAft>
-              <a:buNone/>
-            </a:pPr>
-            <a:r>
-              <a:rPr lang="en-US"/>
-              <a:t>A pointer doesn't point at real memory - virtual addressing is invisible from inside your program, which is exactly why it never came up all semester. Strong pick for anyone who wants to understand what's really inside a process or a container.</a:t>
-            </a:r>
-            <a:endParaRPr/>
+            <a:r>
+              <a:t>Pointer: OSTEP (free online), Wisconsin OS lectures on YouTube.</a:t>
+            </a:r>
           </a:p>
         </p:txBody>
       </p:sp>
@@ -1256,20 +1223,9 @@
           </a:bodyPr>
           <a:lstStyle/>
           <a:p>
-            <a:pPr indent="0" lvl="0" marL="0" rtl="0" algn="l">
-              <a:spcBef>
-                <a:spcPts val="0"/>
-              </a:spcBef>
-              <a:spcAft>
-                <a:spcPts val="0"/>
-              </a:spcAft>
-              <a:buNone/>
-            </a:pPr>
-            <a:r>
-              <a:rPr lang="en-US"/>
-              <a:t>Let them propose - 'there's a backup line?', 'the ISP notices and fixes it?', 'it was already a fixed route?'. The wall: they picture a fixed path, or some central controller with the whole map steering traffic. Neither exists. Reveal: the internet is a graph, and routers run a distributed shortest-path algorithm (distance-vector / link-state, i.e. Bellman-Ford and Dijkstra) that constantly recomputes as links appear and die - surviving pieces going down was literally the ARPANET design goal. If a student bites, BGP is the same idea between whole networks. Pointer: Kurose &amp; Ross (the routing chapters); Beej's guide for the sockets side.</a:t>
-            </a:r>
-            <a:endParaRPr/>
+            <a:r>
+              <a:t>Let them propose first. Answer: distributed shortest-path (Bellman-Ford / Dijkstra) recomputed live. BGP if asked.</a:t>
+            </a:r>
           </a:p>
         </p:txBody>
       </p:sp>
@@ -1407,20 +1363,9 @@
           </a:bodyPr>
           <a:lstStyle/>
           <a:p>
-            <a:pPr indent="0" lvl="0" marL="0" rtl="0" algn="l">
-              <a:spcBef>
-                <a:spcPts val="0"/>
-              </a:spcBef>
-              <a:spcAft>
-                <a:spcPts val="0"/>
-              </a:spcAft>
-              <a:buNone/>
-            </a:pPr>
-            <a:r>
-              <a:rPr lang="en-US"/>
-              <a:t>The network is a graph with no central map, and routing is distributed shortest-path running continuously, so it heals around damage by itself. What breaks intuition here is that the whole thing runs distributed and live and self-healing, with nobody in charge of any of it. That self-healing-under-failure property was the whole ARPANET design motivation.</a:t>
-            </a:r>
-            <a:endParaRPr/>
+            <a:r>
+              <a:t>Pointer: Kurose &amp; Ross routing chapters, Beej's guide for sockets.</a:t>
+            </a:r>
           </a:p>
         </p:txBody>
       </p:sp>
@@ -1557,22 +1502,7 @@
             <a:noAutofit/>
           </a:bodyPr>
           <a:lstStyle/>
-          <a:p>
-            <a:pPr indent="0" lvl="0" marL="0" rtl="0" algn="l">
-              <a:spcBef>
-                <a:spcPts val="0"/>
-              </a:spcBef>
-              <a:spcAft>
-                <a:spcPts val="0"/>
-              </a:spcAft>
-              <a:buNone/>
-            </a:pPr>
-            <a:r>
-              <a:rPr lang="en-US"/>
-              <a:t>The reveal. The cool part, front and center: the network is a graph with no central map, and routing is distributed shortest-path running continuously, so it heals around damage by itself. They may well know Dijkstra already, so what breaks intuition here is that the whole thing runs distributed and live and self-healing, with nobody in charge of any of it. That self-healing-under-failure property was the whole ARPANET design motivation.</a:t>
-            </a:r>
-            <a:endParaRPr/>
-          </a:p>
+          <a:p/>
         </p:txBody>
       </p:sp>
       <p:sp>
@@ -1709,20 +1639,9 @@
           </a:bodyPr>
           <a:lstStyle/>
           <a:p>
-            <a:pPr indent="0" lvl="0" marL="0" rtl="0" algn="l">
-              <a:spcBef>
-                <a:spcPts val="0"/>
-              </a:spcBef>
-              <a:spcAft>
-                <a:spcPts val="0"/>
-              </a:spcAft>
-              <a:buNone/>
-            </a:pPr>
-            <a:r>
-              <a:rPr lang="en-US"/>
-              <a:t>Make them estimate the nested-loop cost first - 10M x 1M is 10 trillion, clearly hours - then point out the DB does it in seconds, so it can't be looping like that. The wall: they assume a join is a loop inside a loop, because that's how they'd write it. Reveal the hash join: one pass over the smaller users table builds an in-memory id-&gt;name hash (~1M), then one pass over messages does an O(1) lookup each (~10M), so ~11M steps, not 10 trillion. Bigger idea: SQL is DECLARATIVE - you said what, not how - and a query planner chose the hash join over other strategies (sort-merge, nested-loop) on its own. Pointer: CMU 15-445 (query execution / optimizer lectures); Kleppmann's 'Designing Data-Intensive Applications.'</a:t>
-            </a:r>
-            <a:endParaRPr/>
+            <a:r>
+              <a:t>Estimate cost out loud first. Answer: hash join, ~11M steps, picked by the query planner.</a:t>
+            </a:r>
           </a:p>
         </p:txBody>
       </p:sp>
@@ -1860,20 +1779,9 @@
           </a:bodyPr>
           <a:lstStyle/>
           <a:p>
-            <a:pPr indent="0" lvl="0" marL="0" rtl="0" algn="l">
-              <a:spcBef>
-                <a:spcPts val="0"/>
-              </a:spcBef>
-              <a:spcAft>
-                <a:spcPts val="0"/>
-              </a:spcAft>
-              <a:buNone/>
-            </a:pPr>
-            <a:r>
-              <a:rPr lang="en-US"/>
-              <a:t>Step one of a hash join, the BUILD. The engine reads the smaller of the two tables (users) exactly once and drops each row into an in-memory hash table keyed by the join column - here id -&gt; name. After this single pass, looking up the name for any id is one O(1) step. Cost so far: ~1M, one row per user. Walk the picture left to right.</a:t>
-            </a:r>
-            <a:endParaRPr/>
+            <a:r>
+              <a:t>Walk left to right. Cost so far: ~1M, one row per user.</a:t>
+            </a:r>
           </a:p>
         </p:txBody>
       </p:sp>
@@ -2011,20 +1919,9 @@
           </a:bodyPr>
           <a:lstStyle/>
           <a:p>
-            <a:pPr indent="0" lvl="0" marL="0" rtl="0" algn="l">
-              <a:spcBef>
-                <a:spcPts val="0"/>
-              </a:spcBef>
-              <a:spcAft>
-                <a:spcPts val="0"/>
-              </a:spcAft>
-              <a:buNone/>
-            </a:pPr>
-            <a:r>
-              <a:rPr lang="en-US"/>
-              <a:t>Step two, the PROBE. The engine walks the BIG table (messages) exactly once; for each row it hashes the user_id, finds the name in the hash table in one O(1) step, and emits the joined row. Cost: ~10M, one lookup per message. Build (~1M) plus probe (~10M) is about 11M steps total, against 10 trillion for the nested-loop way, and nobody wrote a line of that - the planner picked it on its own.</a:t>
-            </a:r>
-            <a:endParaRPr/>
+            <a:r>
+              <a:t>Cost: ~10M, one lookup per message.</a:t>
+            </a:r>
           </a:p>
         </p:txBody>
       </p:sp>
@@ -2162,20 +2059,9 @@
           </a:bodyPr>
           <a:lstStyle/>
           <a:p>
-            <a:pPr indent="0" lvl="0" marL="0" rtl="0" algn="l">
-              <a:spcBef>
-                <a:spcPts val="0"/>
-              </a:spcBef>
-              <a:spcAft>
-                <a:spcPts val="0"/>
-              </a:spcAft>
-              <a:buNone/>
-            </a:pPr>
-            <a:r>
-              <a:rPr lang="en-US"/>
-              <a:t>The reveal. The thing that breaks intuition is that a join is NOT a loop-in-a-loop the way they'd hand-write it - the engine has algorithms (hash join, sort-merge) and a cost-based planner that picks among them. This is query execution / optimization, distinct from the B-trees (2.2) and transactions (2.2 + concurrency) they've already seen. EXPLAIN is the tool that shows the chosen plan.</a:t>
-            </a:r>
-            <a:endParaRPr/>
+            <a:r>
+              <a:t>EXPLAIN shows the chosen plan. Pointer: CMU 15-445, Kleppmann's Designing Data-Intensive Applications.</a:t>
+            </a:r>
           </a:p>
         </p:txBody>
       </p:sp>
@@ -2313,20 +2199,9 @@
           </a:bodyPr>
           <a:lstStyle/>
           <a:p>
-            <a:pPr indent="0" lvl="0" marL="0" rtl="0" algn="l">
-              <a:spcBef>
-                <a:spcPts val="0"/>
-              </a:spcBef>
-              <a:spcAft>
-                <a:spcPts val="0"/>
-              </a:spcAft>
-              <a:buNone/>
-            </a:pPr>
-            <a:r>
-              <a:rPr lang="en-US"/>
-              <a:t>Have them call out a word before the reveal. The wall: 'it only multiplies numbers, so it can't know meaning.' Reveal queen - the famous word2vec result. The model, from reading enough text, put words in a space where direction encodes meaning, so the man-&gt;woman direction equals the king-&gt;queen direction, and meaning becomes literal arithmetic. Pointer: Karpathy's Zero to Hero, and 3Blue1Brown's neural-net / 'what is a GPT' videos for the visuals.</a:t>
-            </a:r>
-            <a:endParaRPr/>
+            <a:r>
+              <a:t>Call out a word before the reveal. Answer: queen (word2vec).</a:t>
+            </a:r>
           </a:p>
         </p:txBody>
       </p:sp>
@@ -2463,22 +2338,7 @@
             <a:noAutofit/>
           </a:bodyPr>
           <a:lstStyle/>
-          <a:p>
-            <a:pPr indent="0" lvl="0" marL="0" rtl="0" algn="l">
-              <a:spcBef>
-                <a:spcPts val="0"/>
-              </a:spcBef>
-              <a:spcAft>
-                <a:spcPts val="0"/>
-              </a:spcAft>
-              <a:buNone/>
-            </a:pPr>
-            <a:r>
-              <a:rPr lang="en-US"/>
-              <a:t>Pivot from demos to the game. By now the demos are done and the room is in 'wrapping up' mode. The next stretch hands them six problems that look easy, lets them answer wrong, and names the field that picks up where their intuition runs out.</a:t>
-            </a:r>
-            <a:endParaRPr/>
-          </a:p>
+          <a:p/>
         </p:txBody>
       </p:sp>
       <p:sp>
@@ -2615,20 +2475,9 @@
           </a:bodyPr>
           <a:lstStyle/>
           <a:p>
-            <a:pPr indent="0" lvl="0" marL="0" rtl="0" algn="l">
-              <a:spcBef>
-                <a:spcPts val="0"/>
-              </a:spcBef>
-              <a:spcAft>
-                <a:spcPts val="0"/>
-              </a:spcAft>
-              <a:buNone/>
-            </a:pPr>
-            <a:r>
-              <a:rPr lang="en-US"/>
-              <a:t>Have them call out a word before the reveal. The wall: 'it only multiplies numbers, so it can't know meaning.' Reveal queen - the famous word2vec result. The model, from reading enough text, put words in a space where direction encodes meaning, so the man-&gt;woman direction equals the king-&gt;queen direction, and meaning becomes literal arithmetic. Pointer: Karpathy's Zero to Hero, and 3Blue1Brown's neural-net / 'what is a GPT' videos for the visuals.</a:t>
-            </a:r>
-            <a:endParaRPr/>
+            <a:r>
+              <a:t>Call out a word before the reveal. Answer: queen (word2vec).</a:t>
+            </a:r>
           </a:p>
         </p:txBody>
       </p:sp>
@@ -2766,20 +2615,9 @@
           </a:bodyPr>
           <a:lstStyle/>
           <a:p>
-            <a:pPr indent="0" lvl="0" marL="0" rtl="0" algn="l">
-              <a:spcBef>
-                <a:spcPts val="0"/>
-              </a:spcBef>
-              <a:spcAft>
-                <a:spcPts val="0"/>
-              </a:spcAft>
-              <a:buNone/>
-            </a:pPr>
-            <a:r>
-              <a:rPr lang="en-US"/>
-              <a:t>The reveal. The surprise is that meaning becomes geometry - you can do arithmetic on concepts - which is the opposite of how they imagine a computer 'handling words.' Embeddings are also the engine behind semantic search and RAG, so this is the obvious follow-on for anyone 10.1 hooked.</a:t>
-            </a:r>
-            <a:endParaRPr/>
+            <a:r>
+              <a:t>Embeddings also drive RAG. Pointer: Karpathy's Zero to Hero, 3Blue1Brown neural-net videos.</a:t>
+            </a:r>
           </a:p>
         </p:txBody>
       </p:sp>
@@ -2917,20 +2755,9 @@
           </a:bodyPr>
           <a:lstStyle/>
           <a:p>
-            <a:pPr indent="0" lvl="0" marL="0" rtl="0" algn="l">
-              <a:spcBef>
-                <a:spcPts val="0"/>
-              </a:spcBef>
-              <a:spcAft>
-                <a:spcPts val="0"/>
-              </a:spcAft>
-              <a:buNone/>
-            </a:pPr>
-            <a:r>
-              <a:rPr lang="en-US"/>
-              <a:t>Let them insist it's impossible - if you heard everything, you know everything they know. That's the wall, and it's the right instinct from everything they've seen. The way out is the paint-mixing picture: mixing two colors is easy, un-mixing is effectively impossible, so each keeps one private color, mixes in public, and they end up at the same blend you can't reverse. That's Diffie-Hellman / public-key crypto, built on one-way functions, and it's how every HTTPS session agrees on a key in the open - the real answer to the coffee-shop WiFi question from 9.2. Pointers: Computerphile's Diffie-Hellman paint video; cryptopals.com; Boneh's Stanford crypto course.</a:t>
-            </a:r>
-            <a:endParaRPr/>
+            <a:r>
+              <a:t>Let them argue it's impossible first. Paint-mixing analogy (Diffie-Hellman): mixing easy, un-mixing impossible.</a:t>
+            </a:r>
           </a:p>
         </p:txBody>
       </p:sp>
@@ -3068,51 +2895,9 @@
           </a:bodyPr>
           <a:lstStyle/>
           <a:p>
-            <a:pPr indent="0" lvl="0" marL="0" rtl="0" algn="l">
-              <a:spcBef>
-                <a:spcPts val="0"/>
-              </a:spcBef>
-              <a:spcAft>
-                <a:spcPts val="0"/>
-              </a:spcAft>
-              <a:buNone/>
-            </a:pPr>
-            <a:r>
-              <a:rPr lang="en-US"/>
-              <a:t>The core idea. A public/private key pair is generated together and mathematically linked: whatever one locks, only the OTHER opens. Because locking and unlocking are now DIFFERENT keys, Bob can publish the locking (public) key to the whole world - the eavesdropper included - without ever exposing the unlocking (private) one. That asymmetry is the whole thing, and it's where the name comes from - asymmetric, or public-key, cryptography.</a:t>
-            </a:r>
-            <a:endParaRPr/>
-          </a:p>
-          <a:p>
-            <a:pPr indent="0" lvl="0" marL="0" rtl="0" algn="l">
-              <a:spcBef>
-                <a:spcPts val="0"/>
-              </a:spcBef>
-              <a:spcAft>
-                <a:spcPts val="0"/>
-              </a:spcAft>
-              <a:buNone/>
-            </a:pPr>
-            <a:r>
-              <a:t/>
-            </a:r>
-            <a:endParaRPr/>
-          </a:p>
-          <a:p>
-            <a:pPr indent="0" lvl="0" marL="0" rtl="0" algn="l">
-              <a:spcBef>
-                <a:spcPts val="0"/>
-              </a:spcBef>
-              <a:spcAft>
-                <a:spcPts val="0"/>
-              </a:spcAft>
-              <a:buNone/>
-            </a:pPr>
-            <a:r>
-              <a:rPr lang="en-US"/>
-              <a:t>See: Euler’s totient function, N = p * q, p, q primes, d x e = 1 mod totient(N)</a:t>
-            </a:r>
-            <a:endParaRPr/>
+            <a:r>
+              <a:t>If asked for the math: N = p*q (primes), d*e = 1 mod totient(N).</a:t>
+            </a:r>
           </a:p>
         </p:txBody>
       </p:sp>
@@ -3249,22 +3034,7 @@
             <a:noAutofit/>
           </a:bodyPr>
           <a:lstStyle/>
-          <a:p>
-            <a:pPr indent="0" lvl="0" marL="0" rtl="0" algn="l">
-              <a:spcBef>
-                <a:spcPts val="0"/>
-              </a:spcBef>
-              <a:spcAft>
-                <a:spcPts val="0"/>
-              </a:spcAft>
-              <a:buNone/>
-            </a:pPr>
-            <a:r>
-              <a:rPr lang="en-US"/>
-              <a:t>The flow. Alice grabs Bob's PUBLIC key (which is public - the attacker has it too), uses it to lock her message, and sends the ciphertext across the open WiFi. Only Bob's PRIVATE key can unlock it. The eavesdropper ends up holding the scrambled bytes AND the public key and still can't read a thing, because the public key only LOCKS - it can't unlock what it locked. In real HTTPS this is how the browser and server bootstrap a private channel with no prior contact.</a:t>
-            </a:r>
-            <a:endParaRPr/>
-          </a:p>
+          <a:p/>
         </p:txBody>
       </p:sp>
       <p:sp>
@@ -3400,22 +3170,7 @@
             <a:noAutofit/>
           </a:bodyPr>
           <a:lstStyle/>
-          <a:p>
-            <a:pPr indent="0" lvl="0" marL="0" rtl="0" algn="l">
-              <a:spcBef>
-                <a:spcPts val="0"/>
-              </a:spcBef>
-              <a:spcAft>
-                <a:spcPts val="0"/>
-              </a:spcAft>
-              <a:buNone/>
-            </a:pPr>
-            <a:r>
-              <a:rPr lang="en-US"/>
-              <a:t>The flow. Alice grabs Bob's PUBLIC key (which is public - the attacker has it too), uses it to lock her message, and sends the ciphertext across the open WiFi. Only Bob's PRIVATE key can unlock it. The eavesdropper ends up holding the scrambled bytes AND the public key and still can't read a thing, because the public key only LOCKS - it can't unlock what it locked. In real HTTPS this is how the browser and server bootstrap a private channel with no prior contact.</a:t>
-            </a:r>
-            <a:endParaRPr/>
-          </a:p>
+          <a:p/>
         </p:txBody>
       </p:sp>
       <p:sp>
@@ -3551,22 +3306,7 @@
             <a:noAutofit/>
           </a:bodyPr>
           <a:lstStyle/>
-          <a:p>
-            <a:pPr indent="0" lvl="0" marL="0" rtl="0" algn="l">
-              <a:spcBef>
-                <a:spcPts val="0"/>
-              </a:spcBef>
-              <a:spcAft>
-                <a:spcPts val="0"/>
-              </a:spcAft>
-              <a:buNone/>
-            </a:pPr>
-            <a:r>
-              <a:rPr lang="en-US"/>
-              <a:t>The flow. Alice grabs Bob's PUBLIC key (which is public - the attacker has it too), uses it to lock her message, and sends the ciphertext across the open WiFi. Only Bob's PRIVATE key can unlock it. The eavesdropper ends up holding the scrambled bytes AND the public key and still can't read a thing, because the public key only LOCKS - it can't unlock what it locked. In real HTTPS this is how the browser and server bootstrap a private channel with no prior contact.</a:t>
-            </a:r>
-            <a:endParaRPr/>
-          </a:p>
+          <a:p/>
         </p:txBody>
       </p:sp>
       <p:sp>
@@ -3703,20 +3443,9 @@
           </a:bodyPr>
           <a:lstStyle/>
           <a:p>
-            <a:pPr indent="0" lvl="0" marL="0" rtl="0" algn="l">
-              <a:spcBef>
-                <a:spcPts val="0"/>
-              </a:spcBef>
-              <a:spcAft>
-                <a:spcPts val="0"/>
-              </a:spcAft>
-              <a:buNone/>
-            </a:pPr>
-            <a:r>
-              <a:rPr lang="en-US"/>
-              <a:t>The reveal. Two things to land: (1) WHY a public key can be public - it rests on a one-way / trapdoor function (easy forward, infeasible back), the classic example being multiply-two-primes vs factor-the-product; and (2) real HTTPS uses the slow public-key step only to agree on a fast symmetric session key, then switches to that - so the asymmetric part bootstraps it and the symmetric part carries the bulk. This is where 9.2's coffee-shop-WiFi question finally gets its answer. 'Don't roll your own crypto' stops being a slogan once you see how subtle this is.</a:t>
-            </a:r>
-            <a:endParaRPr/>
+            <a:r>
+              <a:t>Answers the 9.2 coffee-shop WiFi question. Pointer: Computerphile paint video, cryptopals.com, Boneh's course.</a:t>
+            </a:r>
           </a:p>
         </p:txBody>
       </p:sp>
@@ -3854,146 +3583,9 @@
           </a:bodyPr>
           <a:lstStyle/>
           <a:p>
-            <a:pPr indent="0" lvl="0" marL="0" rtl="0" algn="l">
-              <a:spcBef>
-                <a:spcPts val="0"/>
-              </a:spcBef>
-              <a:spcAft>
-                <a:spcPts val="0"/>
-              </a:spcAft>
-              <a:buNone/>
-            </a:pPr>
-            <a:r>
-              <a:rPr lang="en-US"/>
-              <a:t>This is Turing, 1936.</a:t>
-            </a:r>
-            <a:endParaRPr/>
-          </a:p>
-          <a:p>
-            <a:pPr indent="0" lvl="0" marL="0" rtl="0" algn="l">
-              <a:spcBef>
-                <a:spcPts val="0"/>
-              </a:spcBef>
-              <a:spcAft>
-                <a:spcPts val="0"/>
-              </a:spcAft>
-              <a:buNone/>
-            </a:pPr>
-            <a:r>
-              <a:t/>
-            </a:r>
-            <a:endParaRPr/>
-          </a:p>
-          <a:p>
-            <a:pPr indent="0" lvl="0" marL="0" rtl="0" algn="l">
-              <a:spcBef>
-                <a:spcPts val="0"/>
-              </a:spcBef>
-              <a:spcAft>
-                <a:spcPts val="0"/>
-              </a:spcAft>
-              <a:buNone/>
-            </a:pPr>
-            <a:r>
-              <a:rPr lang="en-US"/>
-              <a:t>def trouble():</a:t>
-            </a:r>
-            <a:endParaRPr/>
-          </a:p>
-          <a:p>
-            <a:pPr indent="0" lvl="0" marL="0" rtl="0" algn="l">
-              <a:spcBef>
-                <a:spcPts val="0"/>
-              </a:spcBef>
-              <a:spcAft>
-                <a:spcPts val="0"/>
-              </a:spcAft>
-              <a:buNone/>
-            </a:pPr>
-            <a:r>
-              <a:rPr lang="en-US"/>
-              <a:t>    if halts(trouble):      # "do I, trouble, ever stop?"</a:t>
-            </a:r>
-            <a:endParaRPr/>
-          </a:p>
-          <a:p>
-            <a:pPr indent="0" lvl="0" marL="0" rtl="0" algn="l">
-              <a:spcBef>
-                <a:spcPts val="0"/>
-              </a:spcBef>
-              <a:spcAft>
-                <a:spcPts val="0"/>
-              </a:spcAft>
-              <a:buNone/>
-            </a:pPr>
-            <a:r>
-              <a:rPr lang="en-US"/>
-              <a:t>        while True:         #   yes? then loop forever</a:t>
-            </a:r>
-            <a:endParaRPr/>
-          </a:p>
-          <a:p>
-            <a:pPr indent="0" lvl="0" marL="0" rtl="0" algn="l">
-              <a:spcBef>
-                <a:spcPts val="0"/>
-              </a:spcBef>
-              <a:spcAft>
-                <a:spcPts val="0"/>
-              </a:spcAft>
-              <a:buNone/>
-            </a:pPr>
-            <a:r>
-              <a:rPr lang="en-US"/>
-              <a:t>            pass</a:t>
-            </a:r>
-            <a:endParaRPr/>
-          </a:p>
-          <a:p>
-            <a:pPr indent="0" lvl="0" marL="0" rtl="0" algn="l">
-              <a:spcBef>
-                <a:spcPts val="0"/>
-              </a:spcBef>
-              <a:spcAft>
-                <a:spcPts val="0"/>
-              </a:spcAft>
-              <a:buNone/>
-            </a:pPr>
-            <a:r>
-              <a:rPr lang="en-US"/>
-              <a:t>    else:                   #   no? then stop right now</a:t>
-            </a:r>
-            <a:endParaRPr/>
-          </a:p>
-          <a:p>
-            <a:pPr indent="0" lvl="0" marL="0" rtl="0" algn="l">
-              <a:spcBef>
-                <a:spcPts val="0"/>
-              </a:spcBef>
-              <a:spcAft>
-                <a:spcPts val="0"/>
-              </a:spcAft>
-              <a:buNone/>
-            </a:pPr>
-            <a:r>
-              <a:rPr lang="en-US"/>
-              <a:t>        return</a:t>
-            </a:r>
-            <a:endParaRPr/>
-          </a:p>
-          <a:p>
-            <a:pPr indent="0" lvl="0" marL="0" rtl="0" algn="l">
-              <a:spcBef>
-                <a:spcPts val="0"/>
-              </a:spcBef>
-              <a:spcAft>
-                <a:spcPts val="0"/>
-              </a:spcAft>
-              <a:buNone/>
-            </a:pPr>
-            <a:r>
-              <a:t/>
-            </a:r>
-            <a:endParaRPr/>
+            <a:r>
+              <a:t>Turing, 1936. Walk both branches on the board, each answer contradicts itself.</a:t>
+            </a:r>
           </a:p>
         </p:txBody>
       </p:sp>
@@ -4131,20 +3723,9 @@
           </a:bodyPr>
           <a:lstStyle/>
           <a:p>
-            <a:pPr indent="0" lvl="0" marL="0" rtl="0" algn="l">
-              <a:spcBef>
-                <a:spcPts val="0"/>
-              </a:spcBef>
-              <a:spcAft>
-                <a:spcPts val="0"/>
-              </a:spcAft>
-              <a:buNone/>
-            </a:pPr>
-            <a:r>
-              <a:rPr lang="en-US"/>
-              <a:t>This is Turing, 1936. Walk it slowly on the board, both branches. If halts(trouble) returns True (it stops), trouble hits `while True` and loops forever - so it does NOT stop. If halts returns False (it loops), trouble takes the else and returns - so it DOES stop. Every possible answer is wrong, so the only thing that can be false is the assumption that halts() exists at all. The payoff: this is WHY no tool - not your linter, not your tests, not a coding agent - can ever flag every infinite loop or prove arbitrary code correct in general. Pointer: Sipser's 'Theory of Computation'; the Computerphile halting-problem video; Petzold's 'The Annotated Turing.'</a:t>
-            </a:r>
-            <a:endParaRPr/>
+            <a:r>
+              <a:t>Turing, 1936. Walk both branches on the board, each answer contradicts itself.</a:t>
+            </a:r>
           </a:p>
         </p:txBody>
       </p:sp>
@@ -4282,20 +3863,9 @@
           </a:bodyPr>
           <a:lstStyle/>
           <a:p>
-            <a:pPr indent="0" lvl="0" marL="0" rtl="0" algn="l">
-              <a:spcBef>
-                <a:spcPts val="0"/>
-              </a:spcBef>
-              <a:spcAft>
-                <a:spcPts val="0"/>
-              </a:spcAft>
-              <a:buNone/>
-            </a:pPr>
-            <a:r>
-              <a:rPr lang="en-US"/>
-              <a:t>Frame it as a game, not a survey. The whole move is getting the room to commit to an answer FIRST, out loud, and only then showing that the obvious answer doesn't hold up and there's a whole field sitting behind the gap. Their wrong answer is doing the setup work for you. Keep the book/course pointers in these notes and only say them out loud if a student bites.</a:t>
-            </a:r>
-            <a:endParaRPr/>
+            <a:r>
+              <a:t>Get a committed answer out loud before each reveal. Book pointers only if asked.</a:t>
+            </a:r>
           </a:p>
         </p:txBody>
       </p:sp>
@@ -4433,20 +4003,9 @@
           </a:bodyPr>
           <a:lstStyle/>
           <a:p>
-            <a:pPr indent="0" lvl="0" marL="0" rtl="0" algn="l">
-              <a:spcBef>
-                <a:spcPts val="0"/>
-              </a:spcBef>
-              <a:spcAft>
-                <a:spcPts val="0"/>
-              </a:spcAft>
-              <a:buNone/>
-            </a:pPr>
-            <a:r>
-              <a:rPr lang="en-US"/>
-              <a:t>This is Turing, 1936. Walk it slowly on the board, both branches. If halts(trouble) returns True (it stops), trouble hits `while True` and loops forever - so it does NOT stop. If halts returns False (it loops), trouble takes the else and returns - so it DOES stop. Every possible answer is wrong, so the only thing that can be false is the assumption that halts() exists at all. The payoff: this is WHY no tool - not your linter, not your tests, not a coding agent - can ever flag every infinite loop or prove arbitrary code correct in general. Pointer: Sipser's 'Theory of Computation'; the Computerphile halting-problem video; Petzold's 'The Annotated Turing.'</a:t>
-            </a:r>
-            <a:endParaRPr/>
+            <a:r>
+              <a:t>Turing, 1936. Walk both branches on the board, each answer contradicts itself.</a:t>
+            </a:r>
           </a:p>
         </p:txBody>
       </p:sp>
@@ -4584,20 +4143,9 @@
           </a:bodyPr>
           <a:lstStyle/>
           <a:p>
-            <a:pPr indent="0" lvl="0" marL="0" rtl="0" algn="l">
-              <a:spcBef>
-                <a:spcPts val="0"/>
-              </a:spcBef>
-              <a:spcAft>
-                <a:spcPts val="0"/>
-              </a:spcAft>
-              <a:buNone/>
-            </a:pPr>
-            <a:r>
-              <a:rPr lang="en-US"/>
-              <a:t>The reveal. The self-reference contradiction is the whole thing - let it land slowly. The connection back to their world: they spent the semester writing tests, CI checks, and leaning on coding agents, and this is the hard ceiling on all of it - 'is this program correct / does it terminate' is undecidable in general, so no tool can ever fully replace running it and thinking. Good, slightly mind-bending note to end the tour on.</a:t>
-            </a:r>
-            <a:endParaRPr/>
+            <a:r>
+              <a:t>Pointer: Sipser, Computerphile halting video, Petzold's The Annotated Turing.</a:t>
+            </a:r>
           </a:p>
         </p:txBody>
       </p:sp>
@@ -4735,20 +4283,9 @@
           </a:bodyPr>
           <a:lstStyle/>
           <a:p>
-            <a:pPr indent="0" lvl="0" marL="0" rtl="0" algn="l">
-              <a:spcBef>
-                <a:spcPts val="0"/>
-              </a:spcBef>
-              <a:spcAft>
-                <a:spcPts val="0"/>
-              </a:spcAft>
-              <a:buNone/>
-            </a:pPr>
-            <a:r>
-              <a:rPr lang="en-US"/>
-              <a:t>The closer. Wrap up the semester on what students DID rather than what they missed - they shipped a working web app, end to end, in ten weeks, and they just watched six whole fields fall out of it.</a:t>
-            </a:r>
-            <a:endParaRPr/>
+            <a:r>
+              <a:t>Close on what they did: shipped a working app end to end in ten weeks.</a:t>
+            </a:r>
           </a:p>
         </p:txBody>
       </p:sp>
@@ -4886,20 +4423,9 @@
           </a:bodyPr>
           <a:lstStyle/>
           <a:p>
-            <a:pPr indent="0" lvl="0" marL="0" rtl="0" algn="l">
-              <a:spcBef>
-                <a:spcPts val="0"/>
-              </a:spcBef>
-              <a:spcAft>
-                <a:spcPts val="0"/>
-              </a:spcAft>
-              <a:buNone/>
-            </a:pPr>
-            <a:r>
-              <a:rPr lang="en-US"/>
-              <a:t>Make them estimate the set's memory out loud first - a few million distinct ids at 8 bytes each plus set overhead is tens of MB, on every server, forever growing. Then ask: could you do it in a FIXED tiny budget no matter how many users? Most will say no - you can't count distinct things without remembering which you've seen. That's the wall. Reveal HyperLogLog: ~12KB, ~2% error, provable. It's what Redis PFCOUNT and most analytics stacks actually use. Pointer: 'Mining of Massive Datasets' (Leskovec et al., free online) for the streaming/sketch material.</a:t>
-            </a:r>
-            <a:endParaRPr/>
+            <a:r>
+              <a:t>Estimate set memory out loud first: tens of MB per server. Ask: fixed tiny budget?</a:t>
+            </a:r>
           </a:p>
         </p:txBody>
       </p:sp>
@@ -5037,20 +4563,9 @@
           </a:bodyPr>
           <a:lstStyle/>
           <a:p>
-            <a:pPr indent="0" lvl="0" marL="0" rtl="0" algn="l">
-              <a:spcBef>
-                <a:spcPts val="0"/>
-              </a:spcBef>
-              <a:spcAft>
-                <a:spcPts val="0"/>
-              </a:spcAft>
-              <a:buNone/>
-            </a:pPr>
-            <a:r>
-              <a:rPr lang="en-US"/>
-              <a:t>The reveal. The thing that breaks their intuition is that you can count distinct items WITHOUT storing them - the CS1/2 reflex is 'use a set,' and the field's answer is a probabilistic sketch with a proof attached. This is the deep end: randomized and streaming algorithms, approximation with guarantees.</a:t>
-            </a:r>
-            <a:endParaRPr/>
+            <a:r>
+              <a:t>~12KB, ~2% error, provable. Redis PFCOUNT. Pointer: Mining of Massive Datasets (free online).</a:t>
+            </a:r>
           </a:p>
         </p:txBody>
       </p:sp>
@@ -5188,20 +4703,9 @@
           </a:bodyPr>
           <a:lstStyle/>
           <a:p>
-            <a:pPr indent="0" lvl="0" marL="0" rtl="0" algn="l">
-              <a:spcBef>
-                <a:spcPts val="0"/>
-              </a:spcBef>
-              <a:spcAft>
-                <a:spcPts val="0"/>
-              </a:spcAft>
-              <a:buNone/>
-            </a:pPr>
-            <a:r>
-              <a:rPr lang="en-US"/>
-              <a:t>The reveal. The thing that breaks their intuition is that you can count distinct items WITHOUT storing them - the CS1/2 reflex is 'use a set,' and the field's answer is a probabilistic sketch with a proof attached. This is the deep end: randomized and streaming algorithms, approximation with guarantees.</a:t>
-            </a:r>
-            <a:endParaRPr/>
+            <a:r>
+              <a:t>~12KB, ~2% error, provable. Redis PFCOUNT. Pointer: Mining of Massive Datasets (free online).</a:t>
+            </a:r>
           </a:p>
         </p:txBody>
       </p:sp>
@@ -5339,20 +4843,9 @@
           </a:bodyPr>
           <a:lstStyle/>
           <a:p>
-            <a:pPr indent="0" lvl="0" marL="0" rtl="0" algn="l">
-              <a:spcBef>
-                <a:spcPts val="0"/>
-              </a:spcBef>
-              <a:spcAft>
-                <a:spcPts val="0"/>
-              </a:spcAft>
-              <a:buNone/>
-            </a:pPr>
-            <a:r>
-              <a:rPr lang="en-US"/>
-              <a:t>The reveal. The thing that breaks their intuition is that you can count distinct items WITHOUT storing them - the CS1/2 reflex is 'use a set,' and the field's answer is a probabilistic sketch with a proof attached. This is the deep end: randomized and streaming algorithms, approximation with guarantees.</a:t>
-            </a:r>
-            <a:endParaRPr/>
+            <a:r>
+              <a:t>~12KB, ~2% error, provable. Redis PFCOUNT. Pointer: Mining of Massive Datasets (free online).</a:t>
+            </a:r>
           </a:p>
         </p:txBody>
       </p:sp>
@@ -5490,20 +4983,9 @@
           </a:bodyPr>
           <a:lstStyle/>
           <a:p>
-            <a:pPr indent="0" lvl="0" marL="0" rtl="0" algn="l">
-              <a:spcBef>
-                <a:spcPts val="0"/>
-              </a:spcBef>
-              <a:spcAft>
-                <a:spcPts val="0"/>
-              </a:spcAft>
-              <a:buNone/>
-            </a:pPr>
-            <a:r>
-              <a:rPr lang="en-US"/>
-              <a:t>Let them guess - 'different RAM sticks?', 'the OS copies it around?', 'one waits for the other?'. The wall: they picture an address as a real fixed location in RAM, so two writes to 0x1000 MUST collide. Reveal virtual memory: the address is per-process and fake, translated to real RAM by the kernel + the MMU on every access. This is the formal version of 9.1's 'process' and 8.1's container. Pointer: OSTEP (free online); Wisconsin lectures on YouTube.</a:t>
-            </a:r>
-            <a:endParaRPr/>
+            <a:r>
+              <a:t>Let them guess first. Answer: virtual memory, per-process addresses translated by kernel + MMU.</a:t>
+            </a:r>
           </a:p>
         </p:txBody>
       </p:sp>
@@ -5641,20 +5123,9 @@
           </a:bodyPr>
           <a:lstStyle/>
           <a:p>
-            <a:pPr indent="0" lvl="0" marL="0" rtl="0" algn="l">
-              <a:spcBef>
-                <a:spcPts val="0"/>
-              </a:spcBef>
-              <a:spcAft>
-                <a:spcPts val="0"/>
-              </a:spcAft>
-              <a:buNone/>
-            </a:pPr>
-            <a:r>
-              <a:rPr lang="en-US"/>
-              <a:t>A pointer doesn't point at real memory - virtual addressing is invisible from inside your program, which is exactly why it never came up all semester. Strong pick for anyone who wants to understand what's really inside a process or a container.</a:t>
-            </a:r>
-            <a:endParaRPr/>
+            <a:r>
+              <a:t>Pointer: OSTEP (free online), Wisconsin OS lectures on YouTube.</a:t>
+            </a:r>
           </a:p>
         </p:txBody>
       </p:sp>

--- a/lectures/Lecture 10.2 - The Future.pptx
+++ b/lectures/Lecture 10.2 - The Future.pptx
@@ -3585,6 +3585,37 @@
           <a:p>
             <a:r>
               <a:t>Turing, 1936. Walk both branches on the board, each answer contradicts itself.</a:t>
+            </a:r>
+          </a:p>
+          <a:p/>
+          <a:p>
+            <a:r>
+              <a:t>def trouble():</a:t>
+            </a:r>
+          </a:p>
+          <a:p>
+            <a:r>
+              <a:t>    if halts(trouble):      # "do I, trouble, ever stop?"</a:t>
+            </a:r>
+          </a:p>
+          <a:p>
+            <a:r>
+              <a:t>        while True:         #   yes? then loop forever</a:t>
+            </a:r>
+          </a:p>
+          <a:p>
+            <a:r>
+              <a:t>            pass</a:t>
+            </a:r>
+          </a:p>
+          <a:p>
+            <a:r>
+              <a:t>    else:                   #   no? then stop right now</a:t>
+            </a:r>
+          </a:p>
+          <a:p>
+            <a:r>
+              <a:t>        return</a:t>
             </a:r>
           </a:p>
         </p:txBody>
